--- a/AutomaTivio/saida/2026-09/pptx/Tivio Infra Plus - Relatório de Gestão - Setembro 2026.pptx
+++ b/AutomaTivio/saida/2026-09/pptx/Tivio Infra Plus - Relatório de Gestão - Setembro 2026.pptx
@@ -12041,7 +12041,7 @@
                 </a:solidFill>
                 <a:latin typeface="Versos"/>
               </a:rPr>
-              <a:t>31/05/2021</a:t>
+              <a:t>15/07/2019</a:t>
             </a:r>
           </a:p>
         </p:txBody>
